--- a/FinAgent-Pro-比赛答辩PPT.pptx
+++ b/FinAgent-Pro-比赛答辩PPT.pptx
@@ -2229,6 +2229,10 @@
           </a:solidFill>
           <a:ln/>
         </p:spPr>
+        <p:txBody>
+          <a:bodyPr/>
+          <a:p/>
+        </p:txBody>
       </p:sp>
       <p:sp>
         <p:nvSpPr>
@@ -2249,6 +2253,10 @@
           </a:solidFill>
           <a:ln/>
         </p:spPr>
+        <p:txBody>
+          <a:bodyPr/>
+          <a:p/>
+        </p:txBody>
       </p:sp>
       <p:sp>
         <p:nvSpPr>
@@ -2271,6 +2279,10 @@
           </a:solidFill>
           <a:ln/>
         </p:spPr>
+        <p:txBody>
+          <a:bodyPr/>
+          <a:p/>
+        </p:txBody>
       </p:sp>
       <p:sp>
         <p:nvSpPr>
@@ -2293,6 +2305,10 @@
           </a:solidFill>
           <a:ln/>
         </p:spPr>
+        <p:txBody>
+          <a:bodyPr/>
+          <a:p/>
+        </p:txBody>
       </p:sp>
       <p:pic>
         <p:nvPicPr>
@@ -2457,6 +2473,10 @@
             <a:prstDash val="solid"/>
           </a:ln>
         </p:spPr>
+        <p:txBody>
+          <a:bodyPr/>
+          <a:p/>
+        </p:txBody>
       </p:sp>
       <p:sp>
         <p:nvSpPr>
@@ -2626,6 +2646,10 @@
           </a:solidFill>
           <a:ln/>
         </p:spPr>
+        <p:txBody>
+          <a:bodyPr/>
+          <a:p/>
+        </p:txBody>
       </p:sp>
       <p:sp>
         <p:nvSpPr>
@@ -4216,6 +4240,10 @@
             </a:outerShdw>
           </a:effectLst>
         </p:spPr>
+        <p:txBody>
+          <a:bodyPr/>
+          <a:p/>
+        </p:txBody>
       </p:sp>
       <p:sp>
         <p:nvSpPr>
@@ -4236,6 +4264,10 @@
           </a:solidFill>
           <a:ln/>
         </p:spPr>
+        <p:txBody>
+          <a:bodyPr/>
+          <a:p/>
+        </p:txBody>
       </p:sp>
       <p:sp>
         <p:nvSpPr>
@@ -4392,6 +4424,10 @@
             </a:outerShdw>
           </a:effectLst>
         </p:spPr>
+        <p:txBody>
+          <a:bodyPr/>
+          <a:p/>
+        </p:txBody>
       </p:sp>
       <p:sp>
         <p:nvSpPr>
@@ -4412,6 +4448,10 @@
           </a:solidFill>
           <a:ln/>
         </p:spPr>
+        <p:txBody>
+          <a:bodyPr/>
+          <a:p/>
+        </p:txBody>
       </p:sp>
       <p:sp>
         <p:nvSpPr>
@@ -4568,6 +4608,10 @@
             </a:outerShdw>
           </a:effectLst>
         </p:spPr>
+        <p:txBody>
+          <a:bodyPr/>
+          <a:p/>
+        </p:txBody>
       </p:sp>
       <p:sp>
         <p:nvSpPr>
@@ -4588,6 +4632,10 @@
           </a:solidFill>
           <a:ln/>
         </p:spPr>
+        <p:txBody>
+          <a:bodyPr/>
+          <a:p/>
+        </p:txBody>
       </p:sp>
       <p:sp>
         <p:nvSpPr>
@@ -4744,6 +4792,10 @@
             </a:outerShdw>
           </a:effectLst>
         </p:spPr>
+        <p:txBody>
+          <a:bodyPr/>
+          <a:p/>
+        </p:txBody>
       </p:sp>
       <p:sp>
         <p:nvSpPr>
@@ -4764,6 +4816,10 @@
           </a:solidFill>
           <a:ln/>
         </p:spPr>
+        <p:txBody>
+          <a:bodyPr/>
+          <a:p/>
+        </p:txBody>
       </p:sp>
       <p:sp>
         <p:nvSpPr>
@@ -4945,6 +5001,10 @@
           </a:solidFill>
           <a:ln/>
         </p:spPr>
+        <p:txBody>
+          <a:bodyPr/>
+          <a:p/>
+        </p:txBody>
       </p:sp>
       <p:sp>
         <p:nvSpPr>
@@ -5089,6 +5149,10 @@
             </a:outerShdw>
           </a:effectLst>
         </p:spPr>
+        <p:txBody>
+          <a:bodyPr/>
+          <a:p/>
+        </p:txBody>
       </p:sp>
       <p:sp>
         <p:nvSpPr>
@@ -5109,6 +5173,10 @@
           </a:solidFill>
           <a:ln/>
         </p:spPr>
+        <p:txBody>
+          <a:bodyPr/>
+          <a:p/>
+        </p:txBody>
       </p:sp>
       <p:pic>
         <p:nvPicPr>
@@ -5206,7 +5274,7 @@
                 <a:ea typeface="Calibri" pitchFamily="34" charset="-122"/>
                 <a:cs typeface="Calibri" pitchFamily="34" charset="-120"/>
               </a:rPr>
-              <a:t>Agent 间真实数据传递，非简单并行调用。Orchestrator 统一规划任务，实现链式决策闭环</a:t>
+              <a:t>Agent 间真实数据传递，非简单并行调用。Orchestrator 统一规划任务，实现DAG 决策闭环</a:t>
             </a:r>
             <a:endParaRPr lang="en-US" sz="1000" dirty="0"/>
           </a:p>
@@ -5238,6 +5306,10 @@
             </a:outerShdw>
           </a:effectLst>
         </p:spPr>
+        <p:txBody>
+          <a:bodyPr/>
+          <a:p/>
+        </p:txBody>
       </p:sp>
       <p:sp>
         <p:nvSpPr>
@@ -5258,6 +5330,10 @@
           </a:solidFill>
           <a:ln/>
         </p:spPr>
+        <p:txBody>
+          <a:bodyPr/>
+          <a:p/>
+        </p:txBody>
       </p:sp>
       <p:pic>
         <p:nvPicPr>
@@ -5387,6 +5463,10 @@
             </a:outerShdw>
           </a:effectLst>
         </p:spPr>
+        <p:txBody>
+          <a:bodyPr/>
+          <a:p/>
+        </p:txBody>
       </p:sp>
       <p:sp>
         <p:nvSpPr>
@@ -5407,6 +5487,10 @@
           </a:solidFill>
           <a:ln/>
         </p:spPr>
+        <p:txBody>
+          <a:bodyPr/>
+          <a:p/>
+        </p:txBody>
       </p:sp>
       <p:pic>
         <p:nvPicPr>
@@ -5536,6 +5620,10 @@
             </a:outerShdw>
           </a:effectLst>
         </p:spPr>
+        <p:txBody>
+          <a:bodyPr/>
+          <a:p/>
+        </p:txBody>
       </p:sp>
       <p:sp>
         <p:nvSpPr>
@@ -5556,6 +5644,10 @@
           </a:solidFill>
           <a:ln/>
         </p:spPr>
+        <p:txBody>
+          <a:bodyPr/>
+          <a:p/>
+        </p:txBody>
       </p:sp>
       <p:pic>
         <p:nvPicPr>
@@ -5685,6 +5777,10 @@
             </a:outerShdw>
           </a:effectLst>
         </p:spPr>
+        <p:txBody>
+          <a:bodyPr/>
+          <a:p/>
+        </p:txBody>
       </p:sp>
       <p:sp>
         <p:nvSpPr>
@@ -5705,6 +5801,10 @@
           </a:solidFill>
           <a:ln/>
         </p:spPr>
+        <p:txBody>
+          <a:bodyPr/>
+          <a:p/>
+        </p:txBody>
       </p:sp>
       <p:pic>
         <p:nvPicPr>
@@ -5834,6 +5934,10 @@
             </a:outerShdw>
           </a:effectLst>
         </p:spPr>
+        <p:txBody>
+          <a:bodyPr/>
+          <a:p/>
+        </p:txBody>
       </p:sp>
       <p:sp>
         <p:nvSpPr>
@@ -5854,6 +5958,10 @@
           </a:solidFill>
           <a:ln/>
         </p:spPr>
+        <p:txBody>
+          <a:bodyPr/>
+          <a:p/>
+        </p:txBody>
       </p:sp>
       <p:pic>
         <p:nvPicPr>
@@ -6132,6 +6240,10 @@
             </a:outerShdw>
           </a:effectLst>
         </p:spPr>
+        <p:txBody>
+          <a:bodyPr/>
+          <a:p/>
+        </p:txBody>
       </p:sp>
       <p:sp>
         <p:nvSpPr>
@@ -6152,6 +6264,10 @@
           </a:solidFill>
           <a:ln/>
         </p:spPr>
+        <p:txBody>
+          <a:bodyPr/>
+          <a:p/>
+        </p:txBody>
       </p:sp>
       <p:sp>
         <p:nvSpPr>
@@ -6378,6 +6494,10 @@
             </a:outerShdw>
           </a:effectLst>
         </p:spPr>
+        <p:txBody>
+          <a:bodyPr/>
+          <a:p/>
+        </p:txBody>
       </p:sp>
       <p:sp>
         <p:nvSpPr>
@@ -6398,6 +6518,10 @@
           </a:solidFill>
           <a:ln/>
         </p:spPr>
+        <p:txBody>
+          <a:bodyPr/>
+          <a:p/>
+        </p:txBody>
       </p:sp>
       <p:sp>
         <p:nvSpPr>
@@ -6624,6 +6748,10 @@
             </a:outerShdw>
           </a:effectLst>
         </p:spPr>
+        <p:txBody>
+          <a:bodyPr/>
+          <a:p/>
+        </p:txBody>
       </p:sp>
       <p:sp>
         <p:nvSpPr>
@@ -6644,6 +6772,10 @@
           </a:solidFill>
           <a:ln/>
         </p:spPr>
+        <p:txBody>
+          <a:bodyPr/>
+          <a:p/>
+        </p:txBody>
       </p:sp>
       <p:sp>
         <p:nvSpPr>
@@ -6872,6 +7004,10 @@
             </a:outerShdw>
           </a:effectLst>
         </p:spPr>
+        <p:txBody>
+          <a:bodyPr/>
+          <a:p/>
+        </p:txBody>
       </p:sp>
       <p:sp>
         <p:nvSpPr>
@@ -6977,6 +7113,10 @@
           </a:solidFill>
           <a:ln/>
         </p:spPr>
+        <p:txBody>
+          <a:bodyPr/>
+          <a:p/>
+        </p:txBody>
       </p:sp>
       <p:sp>
         <p:nvSpPr>
@@ -7121,6 +7261,10 @@
             </a:outerShdw>
           </a:effectLst>
         </p:spPr>
+        <p:txBody>
+          <a:bodyPr/>
+          <a:p/>
+        </p:txBody>
       </p:sp>
       <p:sp>
         <p:nvSpPr>
@@ -7141,6 +7285,10 @@
           </a:solidFill>
           <a:ln/>
         </p:spPr>
+        <p:txBody>
+          <a:bodyPr/>
+          <a:p/>
+        </p:txBody>
       </p:sp>
       <p:sp>
         <p:nvSpPr>
@@ -7297,6 +7445,10 @@
             </a:outerShdw>
           </a:effectLst>
         </p:spPr>
+        <p:txBody>
+          <a:bodyPr/>
+          <a:p/>
+        </p:txBody>
       </p:sp>
       <p:sp>
         <p:nvSpPr>
@@ -7317,6 +7469,10 @@
           </a:solidFill>
           <a:ln/>
         </p:spPr>
+        <p:txBody>
+          <a:bodyPr/>
+          <a:p/>
+        </p:txBody>
       </p:sp>
       <p:sp>
         <p:nvSpPr>
@@ -7473,6 +7629,10 @@
             </a:outerShdw>
           </a:effectLst>
         </p:spPr>
+        <p:txBody>
+          <a:bodyPr/>
+          <a:p/>
+        </p:txBody>
       </p:sp>
       <p:sp>
         <p:nvSpPr>
@@ -7493,6 +7653,10 @@
           </a:solidFill>
           <a:ln/>
         </p:spPr>
+        <p:txBody>
+          <a:bodyPr/>
+          <a:p/>
+        </p:txBody>
       </p:sp>
       <p:sp>
         <p:nvSpPr>
@@ -7649,6 +7813,10 @@
             </a:outerShdw>
           </a:effectLst>
         </p:spPr>
+        <p:txBody>
+          <a:bodyPr/>
+          <a:p/>
+        </p:txBody>
       </p:sp>
       <p:sp>
         <p:nvSpPr>
@@ -7669,6 +7837,10 @@
           </a:solidFill>
           <a:ln/>
         </p:spPr>
+        <p:txBody>
+          <a:bodyPr/>
+          <a:p/>
+        </p:txBody>
       </p:sp>
       <p:sp>
         <p:nvSpPr>
@@ -7850,6 +8022,10 @@
           </a:solidFill>
           <a:ln/>
         </p:spPr>
+        <p:txBody>
+          <a:bodyPr/>
+          <a:p/>
+        </p:txBody>
       </p:sp>
       <p:sp>
         <p:nvSpPr>
@@ -7994,6 +8170,10 @@
             </a:outerShdw>
           </a:effectLst>
         </p:spPr>
+        <p:txBody>
+          <a:bodyPr/>
+          <a:p/>
+        </p:txBody>
       </p:sp>
       <p:sp>
         <p:nvSpPr>
@@ -8014,6 +8194,10 @@
           </a:solidFill>
           <a:ln/>
         </p:spPr>
+        <p:txBody>
+          <a:bodyPr/>
+          <a:p/>
+        </p:txBody>
       </p:sp>
       <p:pic>
         <p:nvPicPr>
@@ -8233,6 +8417,10 @@
             </a:outerShdw>
           </a:effectLst>
         </p:spPr>
+        <p:txBody>
+          <a:bodyPr/>
+          <a:p/>
+        </p:txBody>
       </p:sp>
       <p:sp>
         <p:nvSpPr>
@@ -8253,6 +8441,10 @@
           </a:solidFill>
           <a:ln/>
         </p:spPr>
+        <p:txBody>
+          <a:bodyPr/>
+          <a:p/>
+        </p:txBody>
       </p:sp>
       <p:pic>
         <p:nvPicPr>
@@ -8472,6 +8664,10 @@
             </a:outerShdw>
           </a:effectLst>
         </p:spPr>
+        <p:txBody>
+          <a:bodyPr/>
+          <a:p/>
+        </p:txBody>
       </p:sp>
       <p:sp>
         <p:nvSpPr>
@@ -8492,6 +8688,10 @@
           </a:solidFill>
           <a:ln/>
         </p:spPr>
+        <p:txBody>
+          <a:bodyPr/>
+          <a:p/>
+        </p:txBody>
       </p:sp>
       <p:pic>
         <p:nvPicPr>
@@ -8711,6 +8911,10 @@
             </a:outerShdw>
           </a:effectLst>
         </p:spPr>
+        <p:txBody>
+          <a:bodyPr/>
+          <a:p/>
+        </p:txBody>
       </p:sp>
       <p:sp>
         <p:nvSpPr>
@@ -8816,6 +9020,10 @@
           </a:solidFill>
           <a:ln/>
         </p:spPr>
+        <p:txBody>
+          <a:bodyPr/>
+          <a:p/>
+        </p:txBody>
       </p:sp>
       <p:sp>
         <p:nvSpPr>
@@ -8960,6 +9168,10 @@
             </a:outerShdw>
           </a:effectLst>
         </p:spPr>
+        <p:txBody>
+          <a:bodyPr/>
+          <a:p/>
+        </p:txBody>
       </p:sp>
       <p:sp>
         <p:nvSpPr>
@@ -8980,6 +9192,10 @@
           </a:solidFill>
           <a:ln/>
         </p:spPr>
+        <p:txBody>
+          <a:bodyPr/>
+          <a:p/>
+        </p:txBody>
       </p:sp>
       <p:sp>
         <p:nvSpPr>
@@ -9206,6 +9422,10 @@
             </a:outerShdw>
           </a:effectLst>
         </p:spPr>
+        <p:txBody>
+          <a:bodyPr/>
+          <a:p/>
+        </p:txBody>
       </p:sp>
       <p:sp>
         <p:nvSpPr>
@@ -9226,6 +9446,10 @@
           </a:solidFill>
           <a:ln/>
         </p:spPr>
+        <p:txBody>
+          <a:bodyPr/>
+          <a:p/>
+        </p:txBody>
       </p:sp>
       <p:sp>
         <p:nvSpPr>
@@ -9452,6 +9676,10 @@
             </a:outerShdw>
           </a:effectLst>
         </p:spPr>
+        <p:txBody>
+          <a:bodyPr/>
+          <a:p/>
+        </p:txBody>
       </p:sp>
       <p:sp>
         <p:nvSpPr>
@@ -9472,6 +9700,10 @@
           </a:solidFill>
           <a:ln/>
         </p:spPr>
+        <p:txBody>
+          <a:bodyPr/>
+          <a:p/>
+        </p:txBody>
       </p:sp>
       <p:sp>
         <p:nvSpPr>
@@ -9698,6 +9930,10 @@
             </a:outerShdw>
           </a:effectLst>
         </p:spPr>
+        <p:txBody>
+          <a:bodyPr/>
+          <a:p/>
+        </p:txBody>
       </p:sp>
       <p:sp>
         <p:nvSpPr>
@@ -9803,6 +10039,10 @@
             </a:outerShdw>
           </a:effectLst>
         </p:spPr>
+        <p:txBody>
+          <a:bodyPr/>
+          <a:p/>
+        </p:txBody>
       </p:sp>
       <p:sp>
         <p:nvSpPr>
@@ -9908,6 +10148,10 @@
             </a:outerShdw>
           </a:effectLst>
         </p:spPr>
+        <p:txBody>
+          <a:bodyPr/>
+          <a:p/>
+        </p:txBody>
       </p:sp>
       <p:sp>
         <p:nvSpPr>
@@ -10013,6 +10257,10 @@
             </a:outerShdw>
           </a:effectLst>
         </p:spPr>
+        <p:txBody>
+          <a:bodyPr/>
+          <a:p/>
+        </p:txBody>
       </p:sp>
       <p:sp>
         <p:nvSpPr>
@@ -10143,6 +10391,10 @@
           </a:solidFill>
           <a:ln/>
         </p:spPr>
+        <p:txBody>
+          <a:bodyPr/>
+          <a:p/>
+        </p:txBody>
       </p:sp>
       <p:sp>
         <p:nvSpPr>
@@ -10163,6 +10415,10 @@
           </a:solidFill>
           <a:ln/>
         </p:spPr>
+        <p:txBody>
+          <a:bodyPr/>
+          <a:p/>
+        </p:txBody>
       </p:sp>
       <p:sp>
         <p:nvSpPr>
@@ -10185,6 +10441,10 @@
           </a:solidFill>
           <a:ln/>
         </p:spPr>
+        <p:txBody>
+          <a:bodyPr/>
+          <a:p/>
+        </p:txBody>
       </p:sp>
       <p:sp>
         <p:nvSpPr>
@@ -10207,6 +10467,10 @@
           </a:solidFill>
           <a:ln/>
         </p:spPr>
+        <p:txBody>
+          <a:bodyPr/>
+          <a:p/>
+        </p:txBody>
       </p:sp>
       <p:pic>
         <p:nvPicPr>
@@ -10332,6 +10596,10 @@
             <a:prstDash val="solid"/>
           </a:ln>
         </p:spPr>
+        <p:txBody>
+          <a:bodyPr/>
+          <a:p/>
+        </p:txBody>
       </p:sp>
       <p:sp>
         <p:nvSpPr>
@@ -10501,6 +10769,10 @@
           </a:solidFill>
           <a:ln/>
         </p:spPr>
+        <p:txBody>
+          <a:bodyPr/>
+          <a:p/>
+        </p:txBody>
       </p:sp>
       <p:sp>
         <p:nvSpPr>
@@ -10645,6 +10917,10 @@
             </a:outerShdw>
           </a:effectLst>
         </p:spPr>
+        <p:txBody>
+          <a:bodyPr/>
+          <a:p/>
+        </p:txBody>
       </p:sp>
       <p:sp>
         <p:nvSpPr>
@@ -10665,6 +10941,10 @@
           </a:solidFill>
           <a:ln/>
         </p:spPr>
+        <p:txBody>
+          <a:bodyPr/>
+          <a:p/>
+        </p:txBody>
       </p:sp>
       <p:pic>
         <p:nvPicPr>
@@ -10794,6 +11074,10 @@
             </a:outerShdw>
           </a:effectLst>
         </p:spPr>
+        <p:txBody>
+          <a:bodyPr/>
+          <a:p/>
+        </p:txBody>
       </p:sp>
       <p:sp>
         <p:nvSpPr>
@@ -10814,6 +11098,10 @@
           </a:solidFill>
           <a:ln/>
         </p:spPr>
+        <p:txBody>
+          <a:bodyPr/>
+          <a:p/>
+        </p:txBody>
       </p:sp>
       <p:pic>
         <p:nvPicPr>
@@ -10943,6 +11231,10 @@
             </a:outerShdw>
           </a:effectLst>
         </p:spPr>
+        <p:txBody>
+          <a:bodyPr/>
+          <a:p/>
+        </p:txBody>
       </p:sp>
       <p:sp>
         <p:nvSpPr>
@@ -10963,6 +11255,10 @@
           </a:solidFill>
           <a:ln/>
         </p:spPr>
+        <p:txBody>
+          <a:bodyPr/>
+          <a:p/>
+        </p:txBody>
       </p:sp>
       <p:pic>
         <p:nvPicPr>
@@ -11092,6 +11388,10 @@
             </a:outerShdw>
           </a:effectLst>
         </p:spPr>
+        <p:txBody>
+          <a:bodyPr/>
+          <a:p/>
+        </p:txBody>
       </p:sp>
       <p:sp>
         <p:nvSpPr>
@@ -11197,6 +11497,10 @@
           </a:solidFill>
           <a:ln/>
         </p:spPr>
+        <p:txBody>
+          <a:bodyPr/>
+          <a:p/>
+        </p:txBody>
       </p:sp>
       <p:sp>
         <p:nvSpPr>
@@ -11341,6 +11645,10 @@
             </a:outerShdw>
           </a:effectLst>
         </p:spPr>
+        <p:txBody>
+          <a:bodyPr/>
+          <a:p/>
+        </p:txBody>
       </p:sp>
       <p:sp>
         <p:nvSpPr>
@@ -11361,6 +11669,10 @@
           </a:solidFill>
           <a:ln/>
         </p:spPr>
+        <p:txBody>
+          <a:bodyPr/>
+          <a:p/>
+        </p:txBody>
       </p:sp>
       <p:pic>
         <p:nvPicPr>
@@ -11563,6 +11875,10 @@
             </a:outerShdw>
           </a:effectLst>
         </p:spPr>
+        <p:txBody>
+          <a:bodyPr/>
+          <a:p/>
+        </p:txBody>
       </p:sp>
       <p:sp>
         <p:nvSpPr>
@@ -11583,6 +11899,10 @@
           </a:solidFill>
           <a:ln/>
         </p:spPr>
+        <p:txBody>
+          <a:bodyPr/>
+          <a:p/>
+        </p:txBody>
       </p:sp>
       <p:pic>
         <p:nvPicPr>
@@ -11785,6 +12105,10 @@
             </a:outerShdw>
           </a:effectLst>
         </p:spPr>
+        <p:txBody>
+          <a:bodyPr/>
+          <a:p/>
+        </p:txBody>
       </p:sp>
       <p:sp>
         <p:nvSpPr>
@@ -11805,6 +12129,10 @@
           </a:solidFill>
           <a:ln/>
         </p:spPr>
+        <p:txBody>
+          <a:bodyPr/>
+          <a:p/>
+        </p:txBody>
       </p:sp>
       <p:pic>
         <p:nvPicPr>
@@ -12007,6 +12335,10 @@
             </a:outerShdw>
           </a:effectLst>
         </p:spPr>
+        <p:txBody>
+          <a:bodyPr/>
+          <a:p/>
+        </p:txBody>
       </p:sp>
       <p:sp>
         <p:nvSpPr>
@@ -12027,6 +12359,10 @@
           </a:solidFill>
           <a:ln/>
         </p:spPr>
+        <p:txBody>
+          <a:bodyPr/>
+          <a:p/>
+        </p:txBody>
       </p:sp>
       <p:pic>
         <p:nvPicPr>
@@ -12229,6 +12565,10 @@
             </a:outerShdw>
           </a:effectLst>
         </p:spPr>
+        <p:txBody>
+          <a:bodyPr/>
+          <a:p/>
+        </p:txBody>
       </p:sp>
       <p:pic>
         <p:nvPicPr>
@@ -12468,6 +12808,10 @@
             </a:outerShdw>
           </a:effectLst>
         </p:spPr>
+        <p:txBody>
+          <a:bodyPr/>
+          <a:p/>
+        </p:txBody>
       </p:sp>
       <p:sp>
         <p:nvSpPr>
@@ -12488,6 +12832,10 @@
           </a:solidFill>
           <a:ln/>
         </p:spPr>
+        <p:txBody>
+          <a:bodyPr/>
+          <a:p/>
+        </p:txBody>
       </p:sp>
       <p:pic>
         <p:nvPicPr>
@@ -12653,6 +13001,10 @@
             </a:outerShdw>
           </a:effectLst>
         </p:spPr>
+        <p:txBody>
+          <a:bodyPr/>
+          <a:p/>
+        </p:txBody>
       </p:sp>
       <p:sp>
         <p:nvSpPr>
@@ -12673,6 +13025,10 @@
           </a:solidFill>
           <a:ln/>
         </p:spPr>
+        <p:txBody>
+          <a:bodyPr/>
+          <a:p/>
+        </p:txBody>
       </p:sp>
       <p:pic>
         <p:nvPicPr>
@@ -12838,6 +13194,10 @@
             </a:outerShdw>
           </a:effectLst>
         </p:spPr>
+        <p:txBody>
+          <a:bodyPr/>
+          <a:p/>
+        </p:txBody>
       </p:sp>
       <p:sp>
         <p:nvSpPr>
@@ -12858,6 +13218,10 @@
           </a:solidFill>
           <a:ln/>
         </p:spPr>
+        <p:txBody>
+          <a:bodyPr/>
+          <a:p/>
+        </p:txBody>
       </p:sp>
       <p:pic>
         <p:nvPicPr>
@@ -13023,6 +13387,10 @@
             </a:outerShdw>
           </a:effectLst>
         </p:spPr>
+        <p:txBody>
+          <a:bodyPr/>
+          <a:p/>
+        </p:txBody>
       </p:sp>
       <p:sp>
         <p:nvSpPr>
@@ -13043,6 +13411,10 @@
           </a:solidFill>
           <a:ln/>
         </p:spPr>
+        <p:txBody>
+          <a:bodyPr/>
+          <a:p/>
+        </p:txBody>
       </p:sp>
       <p:pic>
         <p:nvPicPr>
@@ -13197,6 +13569,10 @@
           </a:solidFill>
           <a:ln/>
         </p:spPr>
+        <p:txBody>
+          <a:bodyPr/>
+          <a:p/>
+        </p:txBody>
       </p:sp>
       <p:sp>
         <p:nvSpPr>
@@ -13231,7 +13607,7 @@
                 <a:ea typeface="Arial" pitchFamily="34" charset="-122"/>
                 <a:cs typeface="Arial" pitchFamily="34" charset="-120"/>
               </a:rPr>
-              <a:t>核心创新 ① 多智能体链式协作</a:t>
+              <a:t>核心创新 ① 多智能体DAG 并行编排</a:t>
             </a:r>
             <a:endParaRPr lang="en-US" sz="2800" dirty="0"/>
           </a:p>
@@ -13334,6 +13710,10 @@
           </a:solidFill>
           <a:ln/>
         </p:spPr>
+        <p:txBody>
+          <a:bodyPr/>
+          <a:p/>
+        </p:txBody>
       </p:sp>
       <p:sp>
         <p:nvSpPr>
@@ -13524,6 +13904,10 @@
           </a:solidFill>
           <a:ln/>
         </p:spPr>
+        <p:txBody>
+          <a:bodyPr/>
+          <a:p/>
+        </p:txBody>
       </p:sp>
       <p:sp>
         <p:nvSpPr>
@@ -13714,6 +14098,10 @@
           </a:solidFill>
           <a:ln/>
         </p:spPr>
+        <p:txBody>
+          <a:bodyPr/>
+          <a:p/>
+        </p:txBody>
       </p:sp>
       <p:sp>
         <p:nvSpPr>
@@ -13904,6 +14292,10 @@
           </a:solidFill>
           <a:ln/>
         </p:spPr>
+        <p:txBody>
+          <a:bodyPr/>
+          <a:p/>
+        </p:txBody>
       </p:sp>
       <p:sp>
         <p:nvSpPr>
@@ -14065,6 +14457,10 @@
             </a:outerShdw>
           </a:effectLst>
         </p:spPr>
+        <p:txBody>
+          <a:bodyPr/>
+          <a:p/>
+        </p:txBody>
       </p:sp>
       <p:sp>
         <p:nvSpPr>
@@ -14085,6 +14481,10 @@
           </a:solidFill>
           <a:ln/>
         </p:spPr>
+        <p:txBody>
+          <a:bodyPr/>
+          <a:p/>
+        </p:txBody>
       </p:sp>
       <p:pic>
         <p:nvPicPr>
@@ -14389,6 +14789,10 @@
           </a:solidFill>
           <a:ln/>
         </p:spPr>
+        <p:txBody>
+          <a:bodyPr/>
+          <a:p/>
+        </p:txBody>
       </p:sp>
       <p:sp>
         <p:nvSpPr>
@@ -14533,6 +14937,10 @@
             </a:outerShdw>
           </a:effectLst>
         </p:spPr>
+        <p:txBody>
+          <a:bodyPr/>
+          <a:p/>
+        </p:txBody>
       </p:sp>
       <p:sp>
         <p:nvSpPr>
@@ -14553,6 +14961,10 @@
           </a:solidFill>
           <a:ln/>
         </p:spPr>
+        <p:txBody>
+          <a:bodyPr/>
+          <a:p/>
+        </p:txBody>
       </p:sp>
       <p:sp>
         <p:nvSpPr>
@@ -14819,6 +15231,10 @@
             </a:outerShdw>
           </a:effectLst>
         </p:spPr>
+        <p:txBody>
+          <a:bodyPr/>
+          <a:p/>
+        </p:txBody>
       </p:sp>
       <p:sp>
         <p:nvSpPr>
@@ -14839,6 +15255,10 @@
           </a:solidFill>
           <a:ln/>
         </p:spPr>
+        <p:txBody>
+          <a:bodyPr/>
+          <a:p/>
+        </p:txBody>
       </p:sp>
       <p:sp>
         <p:nvSpPr>
@@ -15254,6 +15674,10 @@
             </a:outerShdw>
           </a:effectLst>
         </p:spPr>
+        <p:txBody>
+          <a:bodyPr/>
+          <a:p/>
+        </p:txBody>
       </p:sp>
       <p:sp>
         <p:nvSpPr>
@@ -15274,6 +15698,10 @@
           </a:solidFill>
           <a:ln/>
         </p:spPr>
+        <p:txBody>
+          <a:bodyPr/>
+          <a:p/>
+        </p:txBody>
       </p:sp>
       <p:pic>
         <p:nvPicPr>
@@ -15524,6 +15952,10 @@
             </a:outerShdw>
           </a:effectLst>
         </p:spPr>
+        <p:txBody>
+          <a:bodyPr/>
+          <a:p/>
+        </p:txBody>
       </p:sp>
       <p:sp>
         <p:nvSpPr>
@@ -15544,6 +15976,10 @@
           </a:solidFill>
           <a:ln/>
         </p:spPr>
+        <p:txBody>
+          <a:bodyPr/>
+          <a:p/>
+        </p:txBody>
       </p:sp>
       <p:pic>
         <p:nvPicPr>
@@ -15794,6 +16230,10 @@
             </a:outerShdw>
           </a:effectLst>
         </p:spPr>
+        <p:txBody>
+          <a:bodyPr/>
+          <a:p/>
+        </p:txBody>
       </p:sp>
       <p:sp>
         <p:nvSpPr>
@@ -15814,6 +16254,10 @@
           </a:solidFill>
           <a:ln/>
         </p:spPr>
+        <p:txBody>
+          <a:bodyPr/>
+          <a:p/>
+        </p:txBody>
       </p:sp>
       <p:pic>
         <p:nvPicPr>
@@ -15912,7 +16356,7 @@
                 <a:ea typeface="Calibri" pitchFamily="34" charset="-122"/>
                 <a:cs typeface="Calibri" pitchFamily="34" charset="-120"/>
               </a:rPr>
-              <a:t>9 个测试模块</a:t>
+              <a:t>102 个后端测试 + 3 个 E2E 测试</a:t>
             </a:r>
             <a:endParaRPr lang="en-US" sz="1000" dirty="0"/>
           </a:p>
@@ -15952,7 +16396,7 @@
                 <a:ea typeface="Calibri" pitchFamily="34" charset="-122"/>
                 <a:cs typeface="Calibri" pitchFamily="34" charset="-120"/>
               </a:rPr>
-              <a:t>46KB 测试代码</a:t>
+              <a:t>完整测试覆盖（pytest + Playwright）</a:t>
             </a:r>
             <a:endParaRPr lang="en-US" sz="1000" dirty="0"/>
           </a:p>
@@ -16064,6 +16508,10 @@
             </a:outerShdw>
           </a:effectLst>
         </p:spPr>
+        <p:txBody>
+          <a:bodyPr/>
+          <a:p/>
+        </p:txBody>
       </p:sp>
       <p:sp>
         <p:nvSpPr>
@@ -16084,6 +16532,10 @@
           </a:solidFill>
           <a:ln/>
         </p:spPr>
+        <p:txBody>
+          <a:bodyPr/>
+          <a:p/>
+        </p:txBody>
       </p:sp>
       <p:pic>
         <p:nvPicPr>
@@ -16359,6 +16811,10 @@
           </a:solidFill>
           <a:ln/>
         </p:spPr>
+        <p:txBody>
+          <a:bodyPr/>
+          <a:p/>
+        </p:txBody>
       </p:sp>
       <p:sp>
         <p:nvSpPr>
@@ -17585,6 +18041,10 @@
             </a:outerShdw>
           </a:effectLst>
         </p:spPr>
+        <p:txBody>
+          <a:bodyPr/>
+          <a:p/>
+        </p:txBody>
       </p:sp>
       <p:sp>
         <p:nvSpPr>
@@ -17605,6 +18065,10 @@
           </a:solidFill>
           <a:ln/>
         </p:spPr>
+        <p:txBody>
+          <a:bodyPr/>
+          <a:p/>
+        </p:txBody>
       </p:sp>
       <p:sp>
         <p:nvSpPr>
@@ -18074,6 +18538,10 @@
           </a:solidFill>
           <a:ln/>
         </p:spPr>
+        <p:txBody>
+          <a:bodyPr/>
+          <a:p/>
+        </p:txBody>
       </p:sp>
       <p:sp>
         <p:nvSpPr>
@@ -18218,6 +18686,10 @@
             </a:outerShdw>
           </a:effectLst>
         </p:spPr>
+        <p:txBody>
+          <a:bodyPr/>
+          <a:p/>
+        </p:txBody>
       </p:sp>
       <p:sp>
         <p:nvSpPr>
@@ -18323,6 +18795,10 @@
             </a:outerShdw>
           </a:effectLst>
         </p:spPr>
+        <p:txBody>
+          <a:bodyPr/>
+          <a:p/>
+        </p:txBody>
       </p:sp>
       <p:sp>
         <p:nvSpPr>
@@ -18428,6 +18904,10 @@
             </a:outerShdw>
           </a:effectLst>
         </p:spPr>
+        <p:txBody>
+          <a:bodyPr/>
+          <a:p/>
+        </p:txBody>
       </p:sp>
       <p:sp>
         <p:nvSpPr>
@@ -18533,6 +19013,10 @@
             </a:outerShdw>
           </a:effectLst>
         </p:spPr>
+        <p:txBody>
+          <a:bodyPr/>
+          <a:p/>
+        </p:txBody>
       </p:sp>
       <p:sp>
         <p:nvSpPr>
